--- a/business-model/GBANDI WAKE_Plateforme_Entree_Sortie_06-03-2026.pptx
+++ b/business-model/GBANDI WAKE_Plateforme_Entree_Sortie_06-03-2026.pptx
@@ -18381,7 +18381,7 @@
                 <a:cs typeface="Arial Black" panose="020B0A04020102020204" pitchFamily="34" charset="0"/>
                 <a:sym typeface="Arial" panose="020B0604020202020204"/>
               </a:rPr>
-              <a:t>I - Wireframe</a:t>
+              <a:t>I - Démo</a:t>
             </a:r>
             <a:endParaRPr lang="fr-FR" sz="2800" b="1" i="0" u="none" strike="noStrike" cap="none" dirty="0">
               <a:solidFill>

--- a/business-model/GBANDI WAKE_Plateforme_Entree_Sortie_06-03-2026.pptx
+++ b/business-model/GBANDI WAKE_Plateforme_Entree_Sortie_06-03-2026.pptx
@@ -17179,7 +17179,7 @@
                           <a:ea typeface="Calibri" panose="020F0502020204030204" pitchFamily="34" charset="0"/>
                           <a:cs typeface="Arial" panose="020B0604020202020204" pitchFamily="34" charset="0"/>
                         </a:rPr>
-                        <a:t>09/04/2026</a:t>
+                        <a:t>24/04/2026</a:t>
                       </a:r>
                       <a:endParaRPr lang="fr-FR" sz="1800" b="1" kern="100" dirty="0">
                         <a:solidFill>
@@ -18032,7 +18032,7 @@
                 <a:cs typeface="Arial" panose="020B0604020202020204" pitchFamily="34" charset="0"/>
                 <a:sym typeface="+mn-ea"/>
               </a:rPr>
-              <a:t>09/04/2026</a:t>
+              <a:t>24/04/2026</a:t>
             </a:r>
             <a:endParaRPr lang="fr-FR" kern="100" dirty="0">
               <a:solidFill>
@@ -18672,7 +18672,7 @@
                 <a:cs typeface="Arial" panose="020B0604020202020204" pitchFamily="34" charset="0"/>
                 <a:sym typeface="+mn-ea"/>
               </a:rPr>
-              <a:t>09/04/2026</a:t>
+              <a:t>24/04/2026</a:t>
             </a:r>
             <a:endParaRPr lang="fr-FR"/>
           </a:p>

--- a/business-model/GBANDI WAKE_Plateforme_Entree_Sortie_06-03-2026.pptx
+++ b/business-model/GBANDI WAKE_Plateforme_Entree_Sortie_06-03-2026.pptx
@@ -280,7 +280,7 @@
             <a:srgbClr val="000000"/>
           </p15:clr>
         </p15:guide>
-        <p15:guide id="2" pos="3883" userDrawn="1">
+        <p15:guide id="2" pos="3882" userDrawn="1">
           <p15:clr>
             <a:srgbClr val="000000"/>
           </p15:clr>
@@ -16395,7 +16395,7 @@
                           <a:ea typeface="Times New Roman" panose="02020603050405020304" pitchFamily="18" charset="0"/>
                           <a:cs typeface="Arial" panose="020B0604020202020204" pitchFamily="34" charset="0"/>
                         </a:rPr>
-                        <a:t>Plateforme de Gestion des Entrées et de Sorties</a:t>
+                        <a:t>Plateforme de Gestion des Business Model</a:t>
                       </a:r>
                       <a:endParaRPr lang="fr-FR" sz="1800" b="1" kern="100" dirty="0">
                         <a:solidFill>
@@ -17179,7 +17179,7 @@
                           <a:ea typeface="Calibri" panose="020F0502020204030204" pitchFamily="34" charset="0"/>
                           <a:cs typeface="Arial" panose="020B0604020202020204" pitchFamily="34" charset="0"/>
                         </a:rPr>
-                        <a:t>24/04/2026</a:t>
+                        <a:t>08/05/2026</a:t>
                       </a:r>
                       <a:endParaRPr lang="fr-FR" sz="1800" b="1" kern="100" dirty="0">
                         <a:solidFill>
@@ -17332,18 +17332,6 @@
                         <a:buNone/>
                         <a:defRPr/>
                       </a:pPr>
-                      <a:r>
-                        <a:rPr lang="fr-FR" sz="1800" b="1" kern="100" noProof="0" dirty="0">
-                          <a:solidFill>
-                            <a:srgbClr val="F99D32"/>
-                          </a:solidFill>
-                          <a:effectLst/>
-                          <a:latin typeface="Arial Narrow" panose="020B0606020202030204" pitchFamily="34" charset="0"/>
-                          <a:ea typeface="Calibri" panose="020F0502020204030204" pitchFamily="34" charset="0"/>
-                          <a:cs typeface="Arial" panose="020B0604020202020204" pitchFamily="34" charset="0"/>
-                        </a:rPr>
-                        <a:t>Jean-Claude MESSAN</a:t>
-                      </a:r>
                       <a:endParaRPr lang="fr-FR" sz="1800" b="1" kern="100" noProof="0" dirty="0">
                         <a:solidFill>
                           <a:srgbClr val="F99D32"/>
@@ -18032,7 +18020,7 @@
                 <a:cs typeface="Arial" panose="020B0604020202020204" pitchFamily="34" charset="0"/>
                 <a:sym typeface="+mn-ea"/>
               </a:rPr>
-              <a:t>24/04/2026</a:t>
+              <a:t>08/05/2026</a:t>
             </a:r>
             <a:endParaRPr lang="fr-FR" kern="100" dirty="0">
               <a:solidFill>
@@ -18672,7 +18660,7 @@
                 <a:cs typeface="Arial" panose="020B0604020202020204" pitchFamily="34" charset="0"/>
                 <a:sym typeface="+mn-ea"/>
               </a:rPr>
-              <a:t>24/04/2026</a:t>
+              <a:t>08/05/2026</a:t>
             </a:r>
             <a:endParaRPr lang="fr-FR"/>
           </a:p>
@@ -18796,7 +18784,7 @@
                 <a:cs typeface="Arial Black" panose="020B0A04020102020204"/>
                 <a:sym typeface="Arial Black" panose="020B0A04020102020204"/>
               </a:rPr>
-              <a:t>MERCI POUR VOTRE ATTENTION</a:t>
+              <a:t>THANK YOU FOR YOUR ATTENTION</a:t>
             </a:r>
             <a:endParaRPr sz="3600" b="1" dirty="0">
               <a:solidFill>

--- a/business-model/GBANDI WAKE_Plateforme_Entree_Sortie_06-03-2026.pptx
+++ b/business-model/GBANDI WAKE_Plateforme_Entree_Sortie_06-03-2026.pptx
@@ -17179,7 +17179,7 @@
                           <a:ea typeface="Calibri" panose="020F0502020204030204" pitchFamily="34" charset="0"/>
                           <a:cs typeface="Arial" panose="020B0604020202020204" pitchFamily="34" charset="0"/>
                         </a:rPr>
-                        <a:t>08/05/2026</a:t>
+                        <a:t>22/05/2026</a:t>
                       </a:r>
                       <a:endParaRPr lang="fr-FR" sz="1800" b="1" kern="100" dirty="0">
                         <a:solidFill>
@@ -17332,6 +17332,18 @@
                         <a:buNone/>
                         <a:defRPr/>
                       </a:pPr>
+                      <a:r>
+                        <a:rPr lang="fr-FR" sz="1800" b="1" kern="100" noProof="0" dirty="0">
+                          <a:solidFill>
+                            <a:srgbClr val="F99D32"/>
+                          </a:solidFill>
+                          <a:effectLst/>
+                          <a:latin typeface="Arial Narrow" panose="020B0606020202030204" pitchFamily="34" charset="0"/>
+                          <a:ea typeface="Calibri" panose="020F0502020204030204" pitchFamily="34" charset="0"/>
+                          <a:cs typeface="Arial" panose="020B0604020202020204" pitchFamily="34" charset="0"/>
+                        </a:rPr>
+                        <a:t>MESSAN Jean-claude</a:t>
+                      </a:r>
                       <a:endParaRPr lang="fr-FR" sz="1800" b="1" kern="100" noProof="0" dirty="0">
                         <a:solidFill>
                           <a:srgbClr val="F99D32"/>
@@ -17554,6 +17566,19 @@
                           <a:spcPts val="800"/>
                         </a:spcAft>
                       </a:pPr>
+                      <a:r>
+                        <a:rPr lang="fr-FR" sz="1800" b="1" kern="100" noProof="0" dirty="0">
+                          <a:solidFill>
+                            <a:srgbClr val="F99D32"/>
+                          </a:solidFill>
+                          <a:effectLst/>
+                          <a:latin typeface="Arial Narrow" panose="020B0606020202030204" pitchFamily="34" charset="0"/>
+                          <a:ea typeface="Calibri" panose="020F0502020204030204" pitchFamily="34" charset="0"/>
+                          <a:cs typeface="Arial" panose="020B0604020202020204" pitchFamily="34" charset="0"/>
+                          <a:sym typeface="+mn-ea"/>
+                        </a:rPr>
+                        <a:t>MESSAN Jean-claude</a:t>
+                      </a:r>
                       <a:endParaRPr lang="fr-FR" sz="1800" b="1" kern="100" dirty="0">
                         <a:solidFill>
                           <a:srgbClr val="F99D32"/>
@@ -18020,7 +18045,7 @@
                 <a:cs typeface="Arial" panose="020B0604020202020204" pitchFamily="34" charset="0"/>
                 <a:sym typeface="+mn-ea"/>
               </a:rPr>
-              <a:t>08/05/2026</a:t>
+              <a:t>22/05/2026</a:t>
             </a:r>
             <a:endParaRPr lang="fr-FR" kern="100" dirty="0">
               <a:solidFill>
@@ -18660,7 +18685,7 @@
                 <a:cs typeface="Arial" panose="020B0604020202020204" pitchFamily="34" charset="0"/>
                 <a:sym typeface="+mn-ea"/>
               </a:rPr>
-              <a:t>08/05/2026</a:t>
+              <a:t>22/05/2026</a:t>
             </a:r>
             <a:endParaRPr lang="fr-FR"/>
           </a:p>
